--- a/FINAL_SUBMISSION/12_中期路演PPT/12_中期路演.pptx
+++ b/FINAL_SUBMISSION/12_中期路演PPT/12_中期路演.pptx
@@ -10,8 +10,10 @@
     <p:sldId id="258" r:id="rId9"/>
     <p:sldId id="259" r:id="rId10"/>
     <p:sldId id="260" r:id="rId11"/>
+    <p:sldId id="261" r:id="rId12"/>
+    <p:sldId id="262" r:id="rId13"/>
   </p:sldIdLst>
-  <p:sldSz cx="9144000" cy="6858000" type="screen4x3"/>
+  <p:sldSz cx="12191695" cy="6858000" type="screen4x3"/>
   <p:notesSz cx="6858000" cy="9144000"/>
   <p:defaultTextStyle>
     <a:defPPr>
@@ -3100,8 +3102,8 @@
         </p:nvSpPr>
         <p:spPr>
           <a:xfrm>
-            <a:off x="457200" y="274320"/>
-            <a:ext cx="9" cy="822960"/>
+            <a:off x="548640" y="320040"/>
+            <a:ext cx="11094415" cy="731520"/>
           </a:xfrm>
           <a:prstGeom prst="rect">
             <a:avLst/>
@@ -3115,7 +3117,7 @@
           <a:lstStyle/>
           <a:p>
             <a:pPr>
-              <a:defRPr sz="2800" b="1"/>
+              <a:defRPr sz="2600" b="1"/>
             </a:pPr>
             <a:r>
               <a:t>模拟证券投资大赛·中期路演</a:t>
@@ -3131,8 +3133,8 @@
         </p:nvSpPr>
         <p:spPr>
           <a:xfrm>
-            <a:off x="640080" y="1188720"/>
-            <a:ext cx="8" cy="4206240"/>
+            <a:off x="548640" y="1234440"/>
+            <a:ext cx="10911535" cy="4937760"/>
           </a:xfrm>
           <a:prstGeom prst="rect">
             <a:avLst/>
@@ -3140,13 +3142,13 @@
           <a:noFill/>
         </p:spPr>
         <p:txBody>
-          <a:bodyPr wrap="none">
+          <a:bodyPr wrap="square">
             <a:spAutoFit/>
           </a:bodyPr>
           <a:lstStyle/>
           <a:p>
             <a:pPr>
-              <a:defRPr sz="1600"/>
+              <a:defRPr sz="1500"/>
             </a:pPr>
             <a:r>
               <a:t>课程：证券期货操作实验　平台：同花顺模拟炒股</a:t>
@@ -3154,10 +3156,18 @@
           </a:p>
           <a:p>
             <a:pPr>
-              <a:defRPr sz="1600"/>
+              <a:defRPr sz="1500"/>
             </a:pPr>
             <a:r>
-              <a:t>汇报内容：投资表现 / 当前持仓 / 投资逻辑 / 阶段复盘 / 下一步计划</a:t>
+              <a:t>汇报内容：投资表现 / 收益对比 / 当前持仓 / 投资逻辑 / 阶段复盘 / 下一步计划</a:t>
+            </a:r>
+          </a:p>
+          <a:p>
+            <a:pPr>
+              <a:defRPr sz="1500"/>
+            </a:pPr>
+            <a:r>
+              <a:t>数据截止：2026-09-08</a:t>
             </a:r>
           </a:p>
         </p:txBody>
@@ -3188,8 +3198,8 @@
         </p:nvSpPr>
         <p:spPr>
           <a:xfrm>
-            <a:off x="457200" y="274320"/>
-            <a:ext cx="9" cy="822960"/>
+            <a:off x="548640" y="320040"/>
+            <a:ext cx="11094415" cy="731520"/>
           </a:xfrm>
           <a:prstGeom prst="rect">
             <a:avLst/>
@@ -3203,7 +3213,7 @@
           <a:lstStyle/>
           <a:p>
             <a:pPr>
-              <a:defRPr sz="2800" b="1"/>
+              <a:defRPr sz="2600" b="1"/>
             </a:pPr>
             <a:r>
               <a:t>1. 当前投资表现</a:t>
@@ -3219,8 +3229,8 @@
         </p:nvSpPr>
         <p:spPr>
           <a:xfrm>
-            <a:off x="640080" y="1188720"/>
-            <a:ext cx="8" cy="4206240"/>
+            <a:off x="548640" y="1234440"/>
+            <a:ext cx="6035040" cy="4937760"/>
           </a:xfrm>
           <a:prstGeom prst="rect">
             <a:avLst/>
@@ -3228,13 +3238,13 @@
           <a:noFill/>
         </p:spPr>
         <p:txBody>
-          <a:bodyPr wrap="none">
+          <a:bodyPr wrap="square">
             <a:spAutoFit/>
           </a:bodyPr>
           <a:lstStyle/>
           <a:p>
             <a:pPr>
-              <a:defRPr sz="1600"/>
+              <a:defRPr sz="1500"/>
             </a:pPr>
             <a:r>
               <a:t>初始资金：500万元</a:t>
@@ -3242,38 +3252,70 @@
           </a:p>
           <a:p>
             <a:pPr>
-              <a:defRPr sz="1600"/>
+              <a:defRPr sz="1500"/>
             </a:pPr>
             <a:r>
-              <a:t>当前总资产：500.00万元</a:t>
+              <a:t>当前总资产：499.07万元</a:t>
             </a:r>
           </a:p>
           <a:p>
             <a:pPr>
-              <a:defRPr sz="1600"/>
+              <a:defRPr sz="1500"/>
             </a:pPr>
             <a:r>
-              <a:t>当前收益率：+0.00%</a:t>
+              <a:t>累计收益率：-0.19%</a:t>
             </a:r>
           </a:p>
           <a:p>
             <a:pPr>
-              <a:defRPr sz="1600"/>
+              <a:defRPr sz="1500"/>
             </a:pPr>
             <a:r>
-              <a:t>同期沪深300：—</a:t>
+              <a:t>同期沪深300：-0.36%</a:t>
             </a:r>
           </a:p>
           <a:p>
             <a:pPr>
-              <a:defRPr sz="1600"/>
+              <a:defRPr sz="1500"/>
             </a:pPr>
             <a:r>
-              <a:t>现金：140.33万元（28.1%）</a:t>
-            </a:r>
-          </a:p>
-        </p:txBody>
-      </p:sp>
+              <a:t>现金：100.06万元（20.0%）</a:t>
+            </a:r>
+          </a:p>
+          <a:p>
+            <a:pPr>
+              <a:defRPr sz="1500"/>
+            </a:pPr>
+            <a:r>
+              <a:t>持仓：4只，累计交易4笔</a:t>
+            </a:r>
+          </a:p>
+        </p:txBody>
+      </p:sp>
+      <p:pic>
+        <p:nvPicPr>
+          <p:cNvPr id="4" name="Picture 3" descr="净值曲线.png"/>
+          <p:cNvPicPr>
+            <a:picLocks noChangeAspect="1"/>
+          </p:cNvPicPr>
+          <p:nvPr/>
+        </p:nvPicPr>
+        <p:blipFill>
+          <a:blip r:embed="rId2"/>
+          <a:stretch>
+            <a:fillRect/>
+          </a:stretch>
+        </p:blipFill>
+        <p:spPr>
+          <a:xfrm>
+            <a:off x="6766560" y="1371600"/>
+            <a:ext cx="5120640" cy="2304288"/>
+          </a:xfrm>
+          <a:prstGeom prst="rect">
+            <a:avLst/>
+          </a:prstGeom>
+        </p:spPr>
+      </p:pic>
     </p:spTree>
   </p:cSld>
   <p:clrMapOvr>
@@ -3300,8 +3342,8 @@
         </p:nvSpPr>
         <p:spPr>
           <a:xfrm>
-            <a:off x="457200" y="274320"/>
-            <a:ext cx="9" cy="822960"/>
+            <a:off x="548640" y="320040"/>
+            <a:ext cx="11094415" cy="731520"/>
           </a:xfrm>
           <a:prstGeom prst="rect">
             <a:avLst/>
@@ -3315,10 +3357,10 @@
           <a:lstStyle/>
           <a:p>
             <a:pPr>
-              <a:defRPr sz="2800" b="1"/>
+              <a:defRPr sz="2600" b="1"/>
             </a:pPr>
             <a:r>
-              <a:t>2. 当前投资组合</a:t>
+              <a:t>2. 收益对比（同起点）</a:t>
             </a:r>
           </a:p>
         </p:txBody>
@@ -3331,8 +3373,8 @@
         </p:nvSpPr>
         <p:spPr>
           <a:xfrm>
-            <a:off x="640080" y="1188720"/>
-            <a:ext cx="8" cy="4206240"/>
+            <a:off x="548640" y="1234440"/>
+            <a:ext cx="6035040" cy="4937760"/>
           </a:xfrm>
           <a:prstGeom prst="rect">
             <a:avLst/>
@@ -3340,39 +3382,191 @@
           <a:noFill/>
         </p:spPr>
         <p:txBody>
+          <a:bodyPr wrap="square">
+            <a:spAutoFit/>
+          </a:bodyPr>
+          <a:lstStyle/>
+          <a:p>
+            <a:pPr>
+              <a:defRPr sz="1500"/>
+            </a:pPr>
+            <a:r>
+              <a:t>对比口径：以组合首个净值日为共同起点。</a:t>
+            </a:r>
+          </a:p>
+          <a:p>
+            <a:pPr>
+              <a:defRPr sz="1500"/>
+            </a:pPr>
+            <a:r>
+              <a:t>组合收益 = 交易盈亏 + 浮动盈亏 − 交易费用。</a:t>
+            </a:r>
+          </a:p>
+          <a:p>
+            <a:pPr>
+              <a:defRPr sz="1500"/>
+            </a:pPr>
+            <a:r>
+              <a:t>宽基ETF底仓提供基准收益，个股贡献超额。</a:t>
+            </a:r>
+          </a:p>
+        </p:txBody>
+      </p:sp>
+      <p:pic>
+        <p:nvPicPr>
+          <p:cNvPr id="4" name="Picture 3" descr="收益对比.png"/>
+          <p:cNvPicPr>
+            <a:picLocks noChangeAspect="1"/>
+          </p:cNvPicPr>
+          <p:nvPr/>
+        </p:nvPicPr>
+        <p:blipFill>
+          <a:blip r:embed="rId2"/>
+          <a:stretch>
+            <a:fillRect/>
+          </a:stretch>
+        </p:blipFill>
+        <p:spPr>
+          <a:xfrm>
+            <a:off x="6766560" y="1371600"/>
+            <a:ext cx="5120640" cy="2560320"/>
+          </a:xfrm>
+          <a:prstGeom prst="rect">
+            <a:avLst/>
+          </a:prstGeom>
+        </p:spPr>
+      </p:pic>
+    </p:spTree>
+  </p:cSld>
+  <p:clrMapOvr>
+    <a:masterClrMapping/>
+  </p:clrMapOvr>
+</p:sld>
+</file>
+
+<file path=ppt/slides/slide4.xml><?xml version="1.0" encoding="utf-8"?>
+<p:sld xmlns:a="http://schemas.openxmlformats.org/drawingml/2006/main" xmlns:p="http://schemas.openxmlformats.org/presentationml/2006/main" xmlns:r="http://schemas.openxmlformats.org/officeDocument/2006/relationships">
+  <p:cSld>
+    <p:spTree>
+      <p:nvGrpSpPr>
+        <p:cNvPr id="1" name=""/>
+        <p:cNvGrpSpPr/>
+        <p:nvPr/>
+      </p:nvGrpSpPr>
+      <p:grpSpPr/>
+      <p:sp>
+        <p:nvSpPr>
+          <p:cNvPr id="2" name="TextBox 1"/>
+          <p:cNvSpPr txBox="1"/>
+          <p:nvPr/>
+        </p:nvSpPr>
+        <p:spPr>
+          <a:xfrm>
+            <a:off x="548640" y="320040"/>
+            <a:ext cx="11094415" cy="731520"/>
+          </a:xfrm>
+          <a:prstGeom prst="rect">
+            <a:avLst/>
+          </a:prstGeom>
+          <a:noFill/>
+        </p:spPr>
+        <p:txBody>
           <a:bodyPr wrap="none">
             <a:spAutoFit/>
           </a:bodyPr>
           <a:lstStyle/>
           <a:p>
             <a:pPr>
-              <a:defRPr sz="1600"/>
+              <a:defRPr sz="2600" b="1"/>
             </a:pPr>
             <a:r>
-              <a:t>持仓逻辑：基本面评分+技术面趋势双确认；单只≤30%。</a:t>
-            </a:r>
-          </a:p>
+              <a:t>3. 当前投资组合</a:t>
+            </a:r>
+          </a:p>
+        </p:txBody>
+      </p:sp>
+      <p:sp>
+        <p:nvSpPr>
+          <p:cNvPr id="3" name="TextBox 2"/>
+          <p:cNvSpPr txBox="1"/>
+          <p:nvPr/>
+        </p:nvSpPr>
+        <p:spPr>
+          <a:xfrm>
+            <a:off x="548640" y="1234440"/>
+            <a:ext cx="6035040" cy="4937760"/>
+          </a:xfrm>
+          <a:prstGeom prst="rect">
+            <a:avLst/>
+          </a:prstGeom>
+          <a:noFill/>
+        </p:spPr>
+        <p:txBody>
+          <a:bodyPr wrap="square">
+            <a:spAutoFit/>
+          </a:bodyPr>
+          <a:lstStyle/>
           <a:p>
             <a:pPr>
-              <a:defRPr sz="1600"/>
+              <a:defRPr sz="1500"/>
             </a:pPr>
             <a:r>
+              <a:t>持仓逻辑：基本面评分 + 技术面趋势双确认；单只≤30%。</a:t>
+            </a:r>
+          </a:p>
+          <a:p>
+            <a:pPr>
+              <a:defRPr sz="1500"/>
+            </a:pPr>
+            <a:r>
+              <a:t>纪律：移动止损（自最高价回撤12%） + 固定止损 -8%。</a:t>
+            </a:r>
+          </a:p>
+          <a:p>
+            <a:pPr>
+              <a:defRPr sz="1500"/>
+            </a:pPr>
+            <a:r>
               <a:t>主要风险：市场系统性回调、行业政策变化。</a:t>
             </a:r>
           </a:p>
         </p:txBody>
       </p:sp>
+      <p:pic>
+        <p:nvPicPr>
+          <p:cNvPr id="4" name="Picture 3" descr="持仓结构.png"/>
+          <p:cNvPicPr>
+            <a:picLocks noChangeAspect="1"/>
+          </p:cNvPicPr>
+          <p:nvPr/>
+        </p:nvPicPr>
+        <p:blipFill>
+          <a:blip r:embed="rId2"/>
+          <a:stretch>
+            <a:fillRect/>
+          </a:stretch>
+        </p:blipFill>
+        <p:spPr>
+          <a:xfrm>
+            <a:off x="6766560" y="1371600"/>
+            <a:ext cx="5120640" cy="2275840"/>
+          </a:xfrm>
+          <a:prstGeom prst="rect">
+            <a:avLst/>
+          </a:prstGeom>
+        </p:spPr>
+      </p:pic>
       <p:graphicFrame>
         <p:nvGraphicFramePr>
-          <p:cNvPr id="4" name="Table 3"/>
+          <p:cNvPr id="5" name="Table 4"/>
           <p:cNvGraphicFramePr>
             <a:graphicFrameLocks noGrp="1"/>
           </p:cNvGraphicFramePr>
           <p:nvPr/>
         </p:nvGraphicFramePr>
         <p:xfrm>
-          <a:off x="640080" y="2743200"/>
-          <a:ext cx="8.6" cy="2377440"/>
+          <a:off x="548640" y="2377440"/>
+          <a:ext cx="11094415" cy="3840480"/>
         </p:xfrm>
         <a:graphic>
           <a:graphicData uri="http://schemas.openxmlformats.org/drawingml/2006/table">
@@ -3381,19 +3575,22 @@
                 <a:tableStyleId>{5C22544A-7EE6-4342-B048-85BDC9FD1C3A}</a:tableStyleId>
               </a:tblPr>
               <a:tblGrid>
-                <a:gridCol w="1"/>
-                <a:gridCol w="1"/>
-                <a:gridCol w="1"/>
-                <a:gridCol w="1"/>
-                <a:gridCol w="1"/>
-                <a:gridCol w="3"/>
+                <a:gridCol w="1849069"/>
+                <a:gridCol w="1849069"/>
+                <a:gridCol w="1849069"/>
+                <a:gridCol w="1849069"/>
+                <a:gridCol w="1849069"/>
+                <a:gridCol w="1849070"/>
               </a:tblGrid>
-              <a:tr h="475488">
+              <a:tr h="640080">
                 <a:tc>
                   <a:txBody>
                     <a:bodyPr/>
                     <a:lstStyle/>
                     <a:p>
+                      <a:pPr>
+                        <a:defRPr sz="1200"/>
+                      </a:pPr>
                       <a:r>
                         <a:t>证券</a:t>
                       </a:r>
@@ -3406,6 +3603,9 @@
                     <a:bodyPr/>
                     <a:lstStyle/>
                     <a:p>
+                      <a:pPr>
+                        <a:defRPr sz="1200"/>
+                      </a:pPr>
                       <a:r>
                         <a:t>持仓(股)</a:t>
                       </a:r>
@@ -3418,6 +3618,9 @@
                     <a:bodyPr/>
                     <a:lstStyle/>
                     <a:p>
+                      <a:pPr>
+                        <a:defRPr sz="1200"/>
+                      </a:pPr>
                       <a:r>
                         <a:t>成本价</a:t>
                       </a:r>
@@ -3430,6 +3633,9 @@
                     <a:bodyPr/>
                     <a:lstStyle/>
                     <a:p>
+                      <a:pPr>
+                        <a:defRPr sz="1200"/>
+                      </a:pPr>
                       <a:r>
                         <a:t>现价</a:t>
                       </a:r>
@@ -3442,6 +3648,9 @@
                     <a:bodyPr/>
                     <a:lstStyle/>
                     <a:p>
+                      <a:pPr>
+                        <a:defRPr sz="1200"/>
+                      </a:pPr>
                       <a:r>
                         <a:t>市值(万元)</a:t>
                       </a:r>
@@ -3454,6 +3663,9 @@
                     <a:bodyPr/>
                     <a:lstStyle/>
                     <a:p>
+                      <a:pPr>
+                        <a:defRPr sz="1200"/>
+                      </a:pPr>
                       <a:r>
                         <a:t>浮盈(万元)</a:t>
                       </a:r>
@@ -3462,12 +3674,15 @@
                   <a:tcPr/>
                 </a:tc>
               </a:tr>
-              <a:tr h="475488">
+              <a:tr h="640080">
                 <a:tc>
                   <a:txBody>
                     <a:bodyPr/>
                     <a:lstStyle/>
                     <a:p>
+                      <a:pPr>
+                        <a:defRPr sz="1100"/>
+                      </a:pPr>
                       <a:r>
                         <a:t>证券</a:t>
                       </a:r>
@@ -3480,6 +3695,9 @@
                     <a:bodyPr/>
                     <a:lstStyle/>
                     <a:p>
+                      <a:pPr>
+                        <a:defRPr sz="1100"/>
+                      </a:pPr>
                       <a:r>
                         <a:t>持仓(股)</a:t>
                       </a:r>
@@ -3492,6 +3710,9 @@
                     <a:bodyPr/>
                     <a:lstStyle/>
                     <a:p>
+                      <a:pPr>
+                        <a:defRPr sz="1100"/>
+                      </a:pPr>
                       <a:r>
                         <a:t>成本价</a:t>
                       </a:r>
@@ -3504,6 +3725,9 @@
                     <a:bodyPr/>
                     <a:lstStyle/>
                     <a:p>
+                      <a:pPr>
+                        <a:defRPr sz="1100"/>
+                      </a:pPr>
                       <a:r>
                         <a:t>现价</a:t>
                       </a:r>
@@ -3516,6 +3740,9 @@
                     <a:bodyPr/>
                     <a:lstStyle/>
                     <a:p>
+                      <a:pPr>
+                        <a:defRPr sz="1100"/>
+                      </a:pPr>
                       <a:r>
                         <a:t>市值(万元)</a:t>
                       </a:r>
@@ -3528,6 +3755,9 @@
                     <a:bodyPr/>
                     <a:lstStyle/>
                     <a:p>
+                      <a:pPr>
+                        <a:defRPr sz="1100"/>
+                      </a:pPr>
                       <a:r>
                         <a:t>浮盈(万元)</a:t>
                       </a:r>
@@ -3536,12 +3766,15 @@
                   <a:tcPr/>
                 </a:tc>
               </a:tr>
-              <a:tr h="475488">
+              <a:tr h="640080">
                 <a:tc>
                   <a:txBody>
                     <a:bodyPr/>
                     <a:lstStyle/>
                     <a:p>
+                      <a:pPr>
+                        <a:defRPr sz="1100"/>
+                      </a:pPr>
                       <a:r>
                         <a:t>沪深300ETF</a:t>
                       </a:r>
@@ -3554,8 +3787,11 @@
                     <a:bodyPr/>
                     <a:lstStyle/>
                     <a:p>
+                      <a:pPr>
+                        <a:defRPr sz="1100"/>
+                      </a:pPr>
                       <a:r>
-                        <a:t>259900</a:t>
+                        <a:t>258900</a:t>
                       </a:r>
                     </a:p>
                   </a:txBody>
@@ -3566,8 +3802,11 @@
                     <a:bodyPr/>
                     <a:lstStyle/>
                     <a:p>
+                      <a:pPr>
+                        <a:defRPr sz="1100"/>
+                      </a:pPr>
                       <a:r>
-                        <a:t>4.62</a:t>
+                        <a:t>4.64</a:t>
                       </a:r>
                     </a:p>
                   </a:txBody>
@@ -3578,8 +3817,11 @@
                     <a:bodyPr/>
                     <a:lstStyle/>
                     <a:p>
+                      <a:pPr>
+                        <a:defRPr sz="1100"/>
+                      </a:pPr>
                       <a:r>
-                        <a:t>4.616</a:t>
+                        <a:t>4.624</a:t>
                       </a:r>
                     </a:p>
                   </a:txBody>
@@ -3590,8 +3832,11 @@
                     <a:bodyPr/>
                     <a:lstStyle/>
                     <a:p>
+                      <a:pPr>
+                        <a:defRPr sz="1100"/>
+                      </a:pPr>
                       <a:r>
-                        <a:t>119.97</a:t>
+                        <a:t>119.72</a:t>
                       </a:r>
                     </a:p>
                   </a:txBody>
@@ -3602,6 +3847,101 @@
                     <a:bodyPr/>
                     <a:lstStyle/>
                     <a:p>
+                      <a:pPr>
+                        <a:defRPr sz="1100"/>
+                      </a:pPr>
+                      <a:r>
+                        <a:t>-0.44</a:t>
+                      </a:r>
+                    </a:p>
+                  </a:txBody>
+                  <a:tcPr/>
+                </a:tc>
+              </a:tr>
+              <a:tr h="640080">
+                <a:tc>
+                  <a:txBody>
+                    <a:bodyPr/>
+                    <a:lstStyle/>
+                    <a:p>
+                      <a:pPr>
+                        <a:defRPr sz="1100"/>
+                      </a:pPr>
+                      <a:r>
+                        <a:t>长江电力</a:t>
+                      </a:r>
+                    </a:p>
+                  </a:txBody>
+                  <a:tcPr/>
+                </a:tc>
+                <a:tc>
+                  <a:txBody>
+                    <a:bodyPr/>
+                    <a:lstStyle/>
+                    <a:p>
+                      <a:pPr>
+                        <a:defRPr sz="1100"/>
+                      </a:pPr>
+                      <a:r>
+                        <a:t>13500</a:t>
+                      </a:r>
+                    </a:p>
+                  </a:txBody>
+                  <a:tcPr/>
+                </a:tc>
+                <a:tc>
+                  <a:txBody>
+                    <a:bodyPr/>
+                    <a:lstStyle/>
+                    <a:p>
+                      <a:pPr>
+                        <a:defRPr sz="1100"/>
+                      </a:pPr>
+                      <a:r>
+                        <a:t>27.87</a:t>
+                      </a:r>
+                    </a:p>
+                  </a:txBody>
+                  <a:tcPr/>
+                </a:tc>
+                <a:tc>
+                  <a:txBody>
+                    <a:bodyPr/>
+                    <a:lstStyle/>
+                    <a:p>
+                      <a:pPr>
+                        <a:defRPr sz="1100"/>
+                      </a:pPr>
+                      <a:r>
+                        <a:t>27.87</a:t>
+                      </a:r>
+                    </a:p>
+                  </a:txBody>
+                  <a:tcPr/>
+                </a:tc>
+                <a:tc>
+                  <a:txBody>
+                    <a:bodyPr/>
+                    <a:lstStyle/>
+                    <a:p>
+                      <a:pPr>
+                        <a:defRPr sz="1100"/>
+                      </a:pPr>
+                      <a:r>
+                        <a:t>37.62</a:t>
+                      </a:r>
+                    </a:p>
+                  </a:txBody>
+                  <a:tcPr/>
+                </a:tc>
+                <a:tc>
+                  <a:txBody>
+                    <a:bodyPr/>
+                    <a:lstStyle/>
+                    <a:p>
+                      <a:pPr>
+                        <a:defRPr sz="1100"/>
+                      </a:pPr>
                       <a:r>
                         <a:t>0.0</a:t>
                       </a:r>
@@ -3610,12 +3950,15 @@
                   <a:tcPr/>
                 </a:tc>
               </a:tr>
-              <a:tr h="475488">
+              <a:tr h="640080">
                 <a:tc>
                   <a:txBody>
                     <a:bodyPr/>
                     <a:lstStyle/>
                     <a:p>
+                      <a:pPr>
+                        <a:defRPr sz="1100"/>
+                      </a:pPr>
                       <a:r>
                         <a:t>中国平安</a:t>
                       </a:r>
@@ -3628,8 +3971,11 @@
                     <a:bodyPr/>
                     <a:lstStyle/>
                     <a:p>
+                      <a:pPr>
+                        <a:defRPr sz="1100"/>
+                      </a:pPr>
                       <a:r>
-                        <a:t>20600</a:t>
+                        <a:t>21200</a:t>
                       </a:r>
                     </a:p>
                   </a:txBody>
@@ -3640,8 +3986,11 @@
                     <a:bodyPr/>
                     <a:lstStyle/>
                     <a:p>
+                      <a:pPr>
+                        <a:defRPr sz="1100"/>
+                      </a:pPr>
                       <a:r>
-                        <a:t>58.24</a:t>
+                        <a:t>56.12</a:t>
                       </a:r>
                     </a:p>
                   </a:txBody>
@@ -3652,8 +4001,11 @@
                     <a:bodyPr/>
                     <a:lstStyle/>
                     <a:p>
+                      <a:pPr>
+                        <a:defRPr sz="1100"/>
+                      </a:pPr>
                       <a:r>
-                        <a:t>58.24</a:t>
+                        <a:t>55.7</a:t>
                       </a:r>
                     </a:p>
                   </a:txBody>
@@ -3664,8 +4016,11 @@
                     <a:bodyPr/>
                     <a:lstStyle/>
                     <a:p>
+                      <a:pPr>
+                        <a:defRPr sz="1100"/>
+                      </a:pPr>
                       <a:r>
-                        <a:t>119.97</a:t>
+                        <a:t>118.08</a:t>
                       </a:r>
                     </a:p>
                   </a:txBody>
@@ -3676,20 +4031,26 @@
                     <a:bodyPr/>
                     <a:lstStyle/>
                     <a:p>
+                      <a:pPr>
+                        <a:defRPr sz="1100"/>
+                      </a:pPr>
                       <a:r>
-                        <a:t>0.0</a:t>
+                        <a:t>-0.89</a:t>
                       </a:r>
                     </a:p>
                   </a:txBody>
                   <a:tcPr/>
                 </a:tc>
               </a:tr>
-              <a:tr h="475488">
+              <a:tr h="640080">
                 <a:tc>
                   <a:txBody>
                     <a:bodyPr/>
                     <a:lstStyle/>
                     <a:p>
+                      <a:pPr>
+                        <a:defRPr sz="1100"/>
+                      </a:pPr>
                       <a:r>
                         <a:t>紫金矿业</a:t>
                       </a:r>
@@ -3702,8 +4063,11 @@
                     <a:bodyPr/>
                     <a:lstStyle/>
                     <a:p>
+                      <a:pPr>
+                        <a:defRPr sz="1100"/>
+                      </a:pPr>
                       <a:r>
-                        <a:t>35900</a:t>
+                        <a:t>36500</a:t>
                       </a:r>
                     </a:p>
                   </a:txBody>
@@ -3714,8 +4078,11 @@
                     <a:bodyPr/>
                     <a:lstStyle/>
                     <a:p>
+                      <a:pPr>
+                        <a:defRPr sz="1100"/>
+                      </a:pPr>
                       <a:r>
-                        <a:t>33.35</a:t>
+                        <a:t>33.75</a:t>
                       </a:r>
                     </a:p>
                   </a:txBody>
@@ -3726,8 +4093,11 @@
                     <a:bodyPr/>
                     <a:lstStyle/>
                     <a:p>
+                      <a:pPr>
+                        <a:defRPr sz="1100"/>
+                      </a:pPr>
                       <a:r>
-                        <a:t>33.35</a:t>
+                        <a:t>33.86</a:t>
                       </a:r>
                     </a:p>
                   </a:txBody>
@@ -3738,8 +4108,11 @@
                     <a:bodyPr/>
                     <a:lstStyle/>
                     <a:p>
+                      <a:pPr>
+                        <a:defRPr sz="1100"/>
+                      </a:pPr>
                       <a:r>
-                        <a:t>119.73</a:t>
+                        <a:t>123.59</a:t>
                       </a:r>
                     </a:p>
                   </a:txBody>
@@ -3750,8 +4123,11 @@
                     <a:bodyPr/>
                     <a:lstStyle/>
                     <a:p>
+                      <a:pPr>
+                        <a:defRPr sz="1100"/>
+                      </a:pPr>
                       <a:r>
-                        <a:t>0.0</a:t>
+                        <a:t>0.4</a:t>
                       </a:r>
                     </a:p>
                   </a:txBody>
@@ -3770,110 +4146,6 @@
 </p:sld>
 </file>
 
-<file path=ppt/slides/slide4.xml><?xml version="1.0" encoding="utf-8"?>
-<p:sld xmlns:a="http://schemas.openxmlformats.org/drawingml/2006/main" xmlns:p="http://schemas.openxmlformats.org/presentationml/2006/main" xmlns:r="http://schemas.openxmlformats.org/officeDocument/2006/relationships">
-  <p:cSld>
-    <p:spTree>
-      <p:nvGrpSpPr>
-        <p:cNvPr id="1" name=""/>
-        <p:cNvGrpSpPr/>
-        <p:nvPr/>
-      </p:nvGrpSpPr>
-      <p:grpSpPr/>
-      <p:sp>
-        <p:nvSpPr>
-          <p:cNvPr id="2" name="TextBox 1"/>
-          <p:cNvSpPr txBox="1"/>
-          <p:nvPr/>
-        </p:nvSpPr>
-        <p:spPr>
-          <a:xfrm>
-            <a:off x="457200" y="274320"/>
-            <a:ext cx="9" cy="822960"/>
-          </a:xfrm>
-          <a:prstGeom prst="rect">
-            <a:avLst/>
-          </a:prstGeom>
-          <a:noFill/>
-        </p:spPr>
-        <p:txBody>
-          <a:bodyPr wrap="none">
-            <a:spAutoFit/>
-          </a:bodyPr>
-          <a:lstStyle/>
-          <a:p>
-            <a:pPr>
-              <a:defRPr sz="2800" b="1"/>
-            </a:pPr>
-            <a:r>
-              <a:t>3. 投资逻辑（候选池Top）</a:t>
-            </a:r>
-          </a:p>
-        </p:txBody>
-      </p:sp>
-      <p:sp>
-        <p:nvSpPr>
-          <p:cNvPr id="3" name="TextBox 2"/>
-          <p:cNvSpPr txBox="1"/>
-          <p:nvPr/>
-        </p:nvSpPr>
-        <p:spPr>
-          <a:xfrm>
-            <a:off x="640080" y="1188720"/>
-            <a:ext cx="8" cy="4206240"/>
-          </a:xfrm>
-          <a:prstGeom prst="rect">
-            <a:avLst/>
-          </a:prstGeom>
-          <a:noFill/>
-        </p:spPr>
-        <p:txBody>
-          <a:bodyPr wrap="none">
-            <a:spAutoFit/>
-          </a:bodyPr>
-          <a:lstStyle/>
-          <a:p>
-            <a:pPr>
-              <a:defRPr sz="1600"/>
-            </a:pPr>
-            <a:r>
-              <a:t>紫金矿业（601899，有色金属）：综合78.0分；基本面优秀，具备中长期配置价值；趋势中性，观望。</a:t>
-            </a:r>
-          </a:p>
-          <a:p>
-            <a:pPr>
-              <a:defRPr sz="1600"/>
-            </a:pPr>
-            <a:r>
-              <a:t>中国平安（601318，保险）：综合71.0分；基本面优秀，具备中长期配置价值；中期趋势向上，可关注/持有。</a:t>
-            </a:r>
-          </a:p>
-          <a:p>
-            <a:pPr>
-              <a:defRPr sz="1600"/>
-            </a:pPr>
-            <a:r>
-              <a:t>长江电力（600900，电力）：综合70.0分；基本面优秀，具备中长期配置价值；中期趋势向上，可关注/持有。</a:t>
-            </a:r>
-          </a:p>
-          <a:p>
-            <a:pPr>
-              <a:defRPr sz="1600"/>
-            </a:pPr>
-            <a:r>
-              <a:t>宁德时代（300750，新能源电池）：综合69.0分；基本面优秀，具备中长期配置价值；趋势中性，观望。</a:t>
-            </a:r>
-          </a:p>
-        </p:txBody>
-      </p:sp>
-    </p:spTree>
-  </p:cSld>
-  <p:clrMapOvr>
-    <a:masterClrMapping/>
-  </p:clrMapOvr>
-</p:sld>
-</file>
-
 <file path=ppt/slides/slide5.xml><?xml version="1.0" encoding="utf-8"?>
 <p:sld xmlns:a="http://schemas.openxmlformats.org/drawingml/2006/main" xmlns:p="http://schemas.openxmlformats.org/presentationml/2006/main" xmlns:r="http://schemas.openxmlformats.org/officeDocument/2006/relationships">
   <p:cSld>
@@ -3892,8 +4164,8 @@
         </p:nvSpPr>
         <p:spPr>
           <a:xfrm>
-            <a:off x="457200" y="274320"/>
-            <a:ext cx="9" cy="822960"/>
+            <a:off x="548640" y="320040"/>
+            <a:ext cx="11094415" cy="731520"/>
           </a:xfrm>
           <a:prstGeom prst="rect">
             <a:avLst/>
@@ -3907,10 +4179,10 @@
           <a:lstStyle/>
           <a:p>
             <a:pPr>
-              <a:defRPr sz="2800" b="1"/>
+              <a:defRPr sz="2600" b="1"/>
             </a:pPr>
             <a:r>
-              <a:t>4. 阶段复盘与下一步计划</a:t>
+              <a:t>4. 投资逻辑（候选池Top5）</a:t>
             </a:r>
           </a:p>
         </p:txBody>
@@ -3923,8 +4195,8 @@
         </p:nvSpPr>
         <p:spPr>
           <a:xfrm>
-            <a:off x="640080" y="1188720"/>
-            <a:ext cx="8" cy="4206240"/>
+            <a:off x="548640" y="1234440"/>
+            <a:ext cx="6035040" cy="4937760"/>
           </a:xfrm>
           <a:prstGeom prst="rect">
             <a:avLst/>
@@ -3932,32 +4204,280 @@
           <a:noFill/>
         </p:spPr>
         <p:txBody>
+          <a:bodyPr wrap="square">
+            <a:spAutoFit/>
+          </a:bodyPr>
+          <a:lstStyle/>
+          <a:p>
+            <a:pPr>
+              <a:defRPr sz="1500"/>
+            </a:pPr>
+            <a:r>
+              <a:t>紫金矿业（601899，有色金属）：综合80.0分；基本面优秀，具备中长期配置价值；中期趋势向上，可关注/持有。</a:t>
+            </a:r>
+          </a:p>
+          <a:p>
+            <a:pPr>
+              <a:defRPr sz="1500"/>
+            </a:pPr>
+            <a:r>
+              <a:t>中国平安（601318，保险）：综合72.0分；基本面优秀，具备中长期配置价值；中期趋势向上，可关注/持有。</a:t>
+            </a:r>
+          </a:p>
+          <a:p>
+            <a:pPr>
+              <a:defRPr sz="1500"/>
+            </a:pPr>
+            <a:r>
+              <a:t>长江电力（600900，电力）：综合70.0分；基本面优秀，具备中长期配置价值；中期趋势向上，可关注/持有。</a:t>
+            </a:r>
+          </a:p>
+          <a:p>
+            <a:pPr>
+              <a:defRPr sz="1500"/>
+            </a:pPr>
+            <a:r>
+              <a:t>宁德时代（300750，新能源电池）：综合68.5分；基本面优秀，具备中长期配置价值；趋势中性，观望。</a:t>
+            </a:r>
+          </a:p>
+          <a:p>
+            <a:pPr>
+              <a:defRPr sz="1500"/>
+            </a:pPr>
+            <a:r>
+              <a:t>招商银行（600036，银行）：综合67.0分；基本面优秀，具备中长期配置价值；中期趋势向上，可关注/持有。</a:t>
+            </a:r>
+          </a:p>
+        </p:txBody>
+      </p:sp>
+      <p:pic>
+        <p:nvPicPr>
+          <p:cNvPr id="4" name="Picture 3" descr="候选池评分.png"/>
+          <p:cNvPicPr>
+            <a:picLocks noChangeAspect="1"/>
+          </p:cNvPicPr>
+          <p:nvPr/>
+        </p:nvPicPr>
+        <p:blipFill>
+          <a:blip r:embed="rId2"/>
+          <a:stretch>
+            <a:fillRect/>
+          </a:stretch>
+        </p:blipFill>
+        <p:spPr>
+          <a:xfrm>
+            <a:off x="6766560" y="1371600"/>
+            <a:ext cx="5120640" cy="2418080"/>
+          </a:xfrm>
+          <a:prstGeom prst="rect">
+            <a:avLst/>
+          </a:prstGeom>
+        </p:spPr>
+      </p:pic>
+    </p:spTree>
+  </p:cSld>
+  <p:clrMapOvr>
+    <a:masterClrMapping/>
+  </p:clrMapOvr>
+</p:sld>
+</file>
+
+<file path=ppt/slides/slide6.xml><?xml version="1.0" encoding="utf-8"?>
+<p:sld xmlns:a="http://schemas.openxmlformats.org/drawingml/2006/main" xmlns:p="http://schemas.openxmlformats.org/presentationml/2006/main" xmlns:r="http://schemas.openxmlformats.org/officeDocument/2006/relationships">
+  <p:cSld>
+    <p:spTree>
+      <p:nvGrpSpPr>
+        <p:cNvPr id="1" name=""/>
+        <p:cNvGrpSpPr/>
+        <p:nvPr/>
+      </p:nvGrpSpPr>
+      <p:grpSpPr/>
+      <p:sp>
+        <p:nvSpPr>
+          <p:cNvPr id="2" name="TextBox 1"/>
+          <p:cNvSpPr txBox="1"/>
+          <p:nvPr/>
+        </p:nvSpPr>
+        <p:spPr>
+          <a:xfrm>
+            <a:off x="548640" y="320040"/>
+            <a:ext cx="11094415" cy="731520"/>
+          </a:xfrm>
+          <a:prstGeom prst="rect">
+            <a:avLst/>
+          </a:prstGeom>
+          <a:noFill/>
+        </p:spPr>
+        <p:txBody>
           <a:bodyPr wrap="none">
             <a:spAutoFit/>
           </a:bodyPr>
           <a:lstStyle/>
           <a:p>
             <a:pPr>
-              <a:defRPr sz="1600"/>
+              <a:defRPr sz="2600" b="1"/>
             </a:pPr>
             <a:r>
-              <a:t>做得好：买入前完成基本面+技术面双检查，纪律执行止盈止损。</a:t>
-            </a:r>
-          </a:p>
+              <a:t>5. 策略验证：为什么改成移动止损</a:t>
+            </a:r>
+          </a:p>
+        </p:txBody>
+      </p:sp>
+      <p:sp>
+        <p:nvSpPr>
+          <p:cNvPr id="3" name="TextBox 2"/>
+          <p:cNvSpPr txBox="1"/>
+          <p:nvPr/>
+        </p:nvSpPr>
+        <p:spPr>
+          <a:xfrm>
+            <a:off x="548640" y="1234440"/>
+            <a:ext cx="10911535" cy="4937760"/>
+          </a:xfrm>
+          <a:prstGeom prst="rect">
+            <a:avLst/>
+          </a:prstGeom>
+          <a:noFill/>
+        </p:spPr>
+        <p:txBody>
+          <a:bodyPr wrap="square">
+            <a:spAutoFit/>
+          </a:bodyPr>
+          <a:lstStyle/>
           <a:p>
             <a:pPr>
-              <a:defRPr sz="1600"/>
+              <a:defRPr sz="1500"/>
             </a:pPr>
             <a:r>
-              <a:t>待改进：对宏观消息反应偏慢；行业集中度需再平衡。</a:t>
+              <a:t>用回测检验策略，而不是凭感觉调参数。</a:t>
             </a:r>
           </a:p>
           <a:p>
             <a:pPr>
-              <a:defRPr sz="1600"/>
+              <a:defRPr sz="1500"/>
             </a:pPr>
             <a:r>
-              <a:t>下一步：跟踪候选池评分变化，技术面恶化标的及时调仓；保持现金≥20%。</a:t>
+              <a:t>固定止盈+9%：无偏回测 -2.75%，最大回撤 -16.93%。</a:t>
+            </a:r>
+          </a:p>
+          <a:p>
+            <a:pPr>
+              <a:defRPr sz="1500"/>
+            </a:pPr>
+            <a:r>
+              <a:t>移动止损（回撤12%）：无偏回测 20.76%，最大回撤 -12.54%。</a:t>
+            </a:r>
+          </a:p>
+          <a:p>
+            <a:pPr>
+              <a:defRPr sz="1500"/>
+            </a:pPr>
+            <a:r>
+              <a:t>交易笔数由 110 笔降到 64 笔——换手越低、费用损耗越小。</a:t>
+            </a:r>
+          </a:p>
+          <a:p>
+            <a:pPr>
+              <a:defRPr sz="1500"/>
+            </a:pPr>
+            <a:r>
+              <a:t>前视偏差检验：打乱基本面分数后收益由 +52.8% 降至 +3.5%，因此只信无偏对照。</a:t>
+            </a:r>
+          </a:p>
+        </p:txBody>
+      </p:sp>
+    </p:spTree>
+  </p:cSld>
+  <p:clrMapOvr>
+    <a:masterClrMapping/>
+  </p:clrMapOvr>
+</p:sld>
+</file>
+
+<file path=ppt/slides/slide7.xml><?xml version="1.0" encoding="utf-8"?>
+<p:sld xmlns:a="http://schemas.openxmlformats.org/drawingml/2006/main" xmlns:p="http://schemas.openxmlformats.org/presentationml/2006/main" xmlns:r="http://schemas.openxmlformats.org/officeDocument/2006/relationships">
+  <p:cSld>
+    <p:spTree>
+      <p:nvGrpSpPr>
+        <p:cNvPr id="1" name=""/>
+        <p:cNvGrpSpPr/>
+        <p:nvPr/>
+      </p:nvGrpSpPr>
+      <p:grpSpPr/>
+      <p:sp>
+        <p:nvSpPr>
+          <p:cNvPr id="2" name="TextBox 1"/>
+          <p:cNvSpPr txBox="1"/>
+          <p:nvPr/>
+        </p:nvSpPr>
+        <p:spPr>
+          <a:xfrm>
+            <a:off x="548640" y="320040"/>
+            <a:ext cx="11094415" cy="731520"/>
+          </a:xfrm>
+          <a:prstGeom prst="rect">
+            <a:avLst/>
+          </a:prstGeom>
+          <a:noFill/>
+        </p:spPr>
+        <p:txBody>
+          <a:bodyPr wrap="none">
+            <a:spAutoFit/>
+          </a:bodyPr>
+          <a:lstStyle/>
+          <a:p>
+            <a:pPr>
+              <a:defRPr sz="2600" b="1"/>
+            </a:pPr>
+            <a:r>
+              <a:t>6. 阶段复盘与下一步计划</a:t>
+            </a:r>
+          </a:p>
+        </p:txBody>
+      </p:sp>
+      <p:sp>
+        <p:nvSpPr>
+          <p:cNvPr id="3" name="TextBox 2"/>
+          <p:cNvSpPr txBox="1"/>
+          <p:nvPr/>
+        </p:nvSpPr>
+        <p:spPr>
+          <a:xfrm>
+            <a:off x="548640" y="1234440"/>
+            <a:ext cx="10911535" cy="4937760"/>
+          </a:xfrm>
+          <a:prstGeom prst="rect">
+            <a:avLst/>
+          </a:prstGeom>
+          <a:noFill/>
+        </p:spPr>
+        <p:txBody>
+          <a:bodyPr wrap="square">
+            <a:spAutoFit/>
+          </a:bodyPr>
+          <a:lstStyle/>
+          <a:p>
+            <a:pPr>
+              <a:defRPr sz="1500"/>
+            </a:pPr>
+            <a:r>
+              <a:t>做得好：买入前完成基本面+技术面双检查，规则引擎前置校验，纪律执行止损。</a:t>
+            </a:r>
+          </a:p>
+          <a:p>
+            <a:pPr>
+              <a:defRPr sz="1500"/>
+            </a:pPr>
+            <a:r>
+              <a:t>待改进：对宏观消息反应偏慢；行业集中度需再平衡；回测与实盘的样本仍偏少。</a:t>
+            </a:r>
+          </a:p>
+          <a:p>
+            <a:pPr>
+              <a:defRPr sz="1500"/>
+            </a:pPr>
+            <a:r>
+              <a:t>下一步：跟踪决策后 T+5/T+10/T+20 超额收益；候选池评分变化及时调仓；保持现金≥20%。</a:t>
             </a:r>
           </a:p>
         </p:txBody>

--- a/FINAL_SUBMISSION/12_中期路演PPT/12_中期路演.pptx
+++ b/FINAL_SUBMISSION/12_中期路演PPT/12_中期路演.pptx
@@ -3271,7 +3271,7 @@
               <a:defRPr sz="1500"/>
             </a:pPr>
             <a:r>
-              <a:t>同期沪深300：-0.36%</a:t>
+              <a:t>同期沪深300：+0.24%</a:t>
             </a:r>
           </a:p>
           <a:p>

--- a/FINAL_SUBMISSION/12_中期路演PPT/12_中期路演.pptx
+++ b/FINAL_SUBMISSION/12_中期路演PPT/12_中期路演.pptx
@@ -3167,7 +3167,7 @@
               <a:defRPr sz="1500"/>
             </a:pPr>
             <a:r>
-              <a:t>数据截止：2026-09-08</a:t>
+              <a:t>数据截止：2026-09-09</a:t>
             </a:r>
           </a:p>
         </p:txBody>
@@ -3255,7 +3255,7 @@
               <a:defRPr sz="1500"/>
             </a:pPr>
             <a:r>
-              <a:t>当前总资产：499.07万元</a:t>
+              <a:t>当前总资产：499.11万元</a:t>
             </a:r>
           </a:p>
           <a:p>
@@ -3263,7 +3263,7 @@
               <a:defRPr sz="1500"/>
             </a:pPr>
             <a:r>
-              <a:t>累计收益率：-0.19%</a:t>
+              <a:t>累计收益率：-0.18%</a:t>
             </a:r>
           </a:p>
           <a:p>
@@ -3271,7 +3271,7 @@
               <a:defRPr sz="1500"/>
             </a:pPr>
             <a:r>
-              <a:t>同期沪深300：+0.24%</a:t>
+              <a:t>同期沪深300：+0.36%</a:t>
             </a:r>
           </a:p>
           <a:p>
@@ -3279,7 +3279,7 @@
               <a:defRPr sz="1500"/>
             </a:pPr>
             <a:r>
-              <a:t>现金：100.06万元（20.0%）</a:t>
+              <a:t>现金：161.73万元（32.4%）</a:t>
             </a:r>
           </a:p>
           <a:p>
@@ -3287,7 +3287,7 @@
               <a:defRPr sz="1500"/>
             </a:pPr>
             <a:r>
-              <a:t>持仓：4只，累计交易4笔</a:t>
+              <a:t>持仓：4只，累计交易5笔</a:t>
             </a:r>
           </a:p>
         </p:txBody>
@@ -3868,98 +3868,6 @@
                         <a:defRPr sz="1100"/>
                       </a:pPr>
                       <a:r>
-                        <a:t>长江电力</a:t>
-                      </a:r>
-                    </a:p>
-                  </a:txBody>
-                  <a:tcPr/>
-                </a:tc>
-                <a:tc>
-                  <a:txBody>
-                    <a:bodyPr/>
-                    <a:lstStyle/>
-                    <a:p>
-                      <a:pPr>
-                        <a:defRPr sz="1100"/>
-                      </a:pPr>
-                      <a:r>
-                        <a:t>13500</a:t>
-                      </a:r>
-                    </a:p>
-                  </a:txBody>
-                  <a:tcPr/>
-                </a:tc>
-                <a:tc>
-                  <a:txBody>
-                    <a:bodyPr/>
-                    <a:lstStyle/>
-                    <a:p>
-                      <a:pPr>
-                        <a:defRPr sz="1100"/>
-                      </a:pPr>
-                      <a:r>
-                        <a:t>27.87</a:t>
-                      </a:r>
-                    </a:p>
-                  </a:txBody>
-                  <a:tcPr/>
-                </a:tc>
-                <a:tc>
-                  <a:txBody>
-                    <a:bodyPr/>
-                    <a:lstStyle/>
-                    <a:p>
-                      <a:pPr>
-                        <a:defRPr sz="1100"/>
-                      </a:pPr>
-                      <a:r>
-                        <a:t>27.87</a:t>
-                      </a:r>
-                    </a:p>
-                  </a:txBody>
-                  <a:tcPr/>
-                </a:tc>
-                <a:tc>
-                  <a:txBody>
-                    <a:bodyPr/>
-                    <a:lstStyle/>
-                    <a:p>
-                      <a:pPr>
-                        <a:defRPr sz="1100"/>
-                      </a:pPr>
-                      <a:r>
-                        <a:t>37.62</a:t>
-                      </a:r>
-                    </a:p>
-                  </a:txBody>
-                  <a:tcPr/>
-                </a:tc>
-                <a:tc>
-                  <a:txBody>
-                    <a:bodyPr/>
-                    <a:lstStyle/>
-                    <a:p>
-                      <a:pPr>
-                        <a:defRPr sz="1100"/>
-                      </a:pPr>
-                      <a:r>
-                        <a:t>0.0</a:t>
-                      </a:r>
-                    </a:p>
-                  </a:txBody>
-                  <a:tcPr/>
-                </a:tc>
-              </a:tr>
-              <a:tr h="640080">
-                <a:tc>
-                  <a:txBody>
-                    <a:bodyPr/>
-                    <a:lstStyle/>
-                    <a:p>
-                      <a:pPr>
-                        <a:defRPr sz="1100"/>
-                      </a:pPr>
-                      <a:r>
                         <a:t>中国平安</a:t>
                       </a:r>
                     </a:p>
@@ -4067,7 +3975,7 @@
                         <a:defRPr sz="1100"/>
                       </a:pPr>
                       <a:r>
-                        <a:t>36500</a:t>
+                        <a:t>18300</a:t>
                       </a:r>
                     </a:p>
                   </a:txBody>
@@ -4112,7 +4020,7 @@
                         <a:defRPr sz="1100"/>
                       </a:pPr>
                       <a:r>
-                        <a:t>123.59</a:t>
+                        <a:t>61.96</a:t>
                       </a:r>
                     </a:p>
                   </a:txBody>
@@ -4127,7 +4035,99 @@
                         <a:defRPr sz="1100"/>
                       </a:pPr>
                       <a:r>
-                        <a:t>0.4</a:t>
+                        <a:t>0.2</a:t>
+                      </a:r>
+                    </a:p>
+                  </a:txBody>
+                  <a:tcPr/>
+                </a:tc>
+              </a:tr>
+              <a:tr h="640080">
+                <a:tc>
+                  <a:txBody>
+                    <a:bodyPr/>
+                    <a:lstStyle/>
+                    <a:p>
+                      <a:pPr>
+                        <a:defRPr sz="1100"/>
+                      </a:pPr>
+                      <a:r>
+                        <a:t>长江电力</a:t>
+                      </a:r>
+                    </a:p>
+                  </a:txBody>
+                  <a:tcPr/>
+                </a:tc>
+                <a:tc>
+                  <a:txBody>
+                    <a:bodyPr/>
+                    <a:lstStyle/>
+                    <a:p>
+                      <a:pPr>
+                        <a:defRPr sz="1100"/>
+                      </a:pPr>
+                      <a:r>
+                        <a:t>13500</a:t>
+                      </a:r>
+                    </a:p>
+                  </a:txBody>
+                  <a:tcPr/>
+                </a:tc>
+                <a:tc>
+                  <a:txBody>
+                    <a:bodyPr/>
+                    <a:lstStyle/>
+                    <a:p>
+                      <a:pPr>
+                        <a:defRPr sz="1100"/>
+                      </a:pPr>
+                      <a:r>
+                        <a:t>27.84</a:t>
+                      </a:r>
+                    </a:p>
+                  </a:txBody>
+                  <a:tcPr/>
+                </a:tc>
+                <a:tc>
+                  <a:txBody>
+                    <a:bodyPr/>
+                    <a:lstStyle/>
+                    <a:p>
+                      <a:pPr>
+                        <a:defRPr sz="1100"/>
+                      </a:pPr>
+                      <a:r>
+                        <a:t>27.87</a:t>
+                      </a:r>
+                    </a:p>
+                  </a:txBody>
+                  <a:tcPr/>
+                </a:tc>
+                <a:tc>
+                  <a:txBody>
+                    <a:bodyPr/>
+                    <a:lstStyle/>
+                    <a:p>
+                      <a:pPr>
+                        <a:defRPr sz="1100"/>
+                      </a:pPr>
+                      <a:r>
+                        <a:t>37.62</a:t>
+                      </a:r>
+                    </a:p>
+                  </a:txBody>
+                  <a:tcPr/>
+                </a:tc>
+                <a:tc>
+                  <a:txBody>
+                    <a:bodyPr/>
+                    <a:lstStyle/>
+                    <a:p>
+                      <a:pPr>
+                        <a:defRPr sz="1100"/>
+                      </a:pPr>
+                      <a:r>
+                        <a:t>0.04</a:t>
                       </a:r>
                     </a:p>
                   </a:txBody>
